--- a/content/docs/theory-analysis/kubernetes-gateway-api/images/images.pptx
+++ b/content/docs/theory-analysis/kubernetes-gateway-api/images/images.pptx
@@ -3532,7 +3532,7 @@
             <a:pPr algn="ctr"/>
             <a:r>
               <a:rPr lang="en-US" altLang="ko-KR" sz="900"/>
-              <a:t>Primary</a:t>
+              <a:t>Vendor</a:t>
             </a:r>
           </a:p>
           <a:p>
@@ -4888,7 +4888,7 @@
             <a:pPr algn="ctr"/>
             <a:r>
               <a:rPr lang="en-US" altLang="ko-KR" sz="900"/>
-              <a:t>App B</a:t>
+              <a:t>Internal App</a:t>
             </a:r>
           </a:p>
           <a:p>
@@ -5020,7 +5020,7 @@
             <a:pPr algn="ctr"/>
             <a:r>
               <a:rPr lang="en-US" altLang="ko-KR" sz="900"/>
-              <a:t>App B</a:t>
+              <a:t>Internal App</a:t>
             </a:r>
           </a:p>
           <a:p>
@@ -5086,7 +5086,7 @@
             <a:pPr algn="ctr"/>
             <a:r>
               <a:rPr lang="en-US" altLang="ko-KR" sz="900"/>
-              <a:t>App B</a:t>
+              <a:t>Internal App</a:t>
             </a:r>
           </a:p>
           <a:p>
@@ -6603,13 +6603,9 @@
             </a:br>
             <a:r>
               <a:rPr lang="en-US" altLang="ko-KR" sz="900" b="1"/>
-              <a:t>Operato</a:t>
-            </a:r>
-            <a:r>
-              <a:rPr lang="en-US" altLang="ko-KR" sz="900"/>
-              <a:t>r</a:t>
-            </a:r>
-            <a:endParaRPr lang="en-KR" sz="900"/>
+              <a:t>Operator</a:t>
+            </a:r>
+            <a:endParaRPr lang="en-KR" sz="900" b="1"/>
           </a:p>
         </p:txBody>
       </p:sp>

--- a/content/docs/theory-analysis/kubernetes-gateway-api/images/images.pptx
+++ b/content/docs/theory-analysis/kubernetes-gateway-api/images/images.pptx
@@ -215,7 +215,7 @@
           <a:p>
             <a:fld id="{6CD5550B-26C4-49A9-A5BA-636EF7BE6CE9}" type="datetimeFigureOut">
               <a:rPr lang="ko-KR" altLang="en-US" smtClean="0"/>
-              <a:t>2026. 9. 22.</a:t>
+              <a:t>2026. 10. 6.</a:t>
             </a:fld>
             <a:endParaRPr lang="ko-KR" altLang="en-US"/>
           </a:p>
@@ -745,7 +745,7 @@
           <a:p>
             <a:fld id="{FB30EDBD-1C2D-4C1E-B459-B60219FAB484}" type="datetimeFigureOut">
               <a:rPr lang="ko-KR" altLang="en-US" smtClean="0"/>
-              <a:t>2026. 9. 22.</a:t>
+              <a:t>2026. 10. 6.</a:t>
             </a:fld>
             <a:endParaRPr lang="ko-KR" altLang="en-US"/>
           </a:p>
@@ -908,7 +908,7 @@
           <a:p>
             <a:fld id="{FB30EDBD-1C2D-4C1E-B459-B60219FAB484}" type="datetimeFigureOut">
               <a:rPr lang="ko-KR" altLang="en-US" smtClean="0"/>
-              <a:t>2026. 9. 22.</a:t>
+              <a:t>2026. 10. 6.</a:t>
             </a:fld>
             <a:endParaRPr lang="ko-KR" altLang="en-US"/>
           </a:p>
@@ -1081,7 +1081,7 @@
           <a:p>
             <a:fld id="{FB30EDBD-1C2D-4C1E-B459-B60219FAB484}" type="datetimeFigureOut">
               <a:rPr lang="ko-KR" altLang="en-US" smtClean="0"/>
-              <a:t>2026. 9. 22.</a:t>
+              <a:t>2026. 10. 6.</a:t>
             </a:fld>
             <a:endParaRPr lang="ko-KR" altLang="en-US"/>
           </a:p>
@@ -1244,7 +1244,7 @@
           <a:p>
             <a:fld id="{FB30EDBD-1C2D-4C1E-B459-B60219FAB484}" type="datetimeFigureOut">
               <a:rPr lang="ko-KR" altLang="en-US" smtClean="0"/>
-              <a:t>2026. 9. 22.</a:t>
+              <a:t>2026. 10. 6.</a:t>
             </a:fld>
             <a:endParaRPr lang="ko-KR" altLang="en-US"/>
           </a:p>
@@ -1484,7 +1484,7 @@
           <a:p>
             <a:fld id="{FB30EDBD-1C2D-4C1E-B459-B60219FAB484}" type="datetimeFigureOut">
               <a:rPr lang="ko-KR" altLang="en-US" smtClean="0"/>
-              <a:t>2026. 9. 22.</a:t>
+              <a:t>2026. 10. 6.</a:t>
             </a:fld>
             <a:endParaRPr lang="ko-KR" altLang="en-US"/>
           </a:p>
@@ -1764,7 +1764,7 @@
           <a:p>
             <a:fld id="{FB30EDBD-1C2D-4C1E-B459-B60219FAB484}" type="datetimeFigureOut">
               <a:rPr lang="ko-KR" altLang="en-US" smtClean="0"/>
-              <a:t>2026. 9. 22.</a:t>
+              <a:t>2026. 10. 6.</a:t>
             </a:fld>
             <a:endParaRPr lang="ko-KR" altLang="en-US"/>
           </a:p>
@@ -2178,7 +2178,7 @@
           <a:p>
             <a:fld id="{FB30EDBD-1C2D-4C1E-B459-B60219FAB484}" type="datetimeFigureOut">
               <a:rPr lang="ko-KR" altLang="en-US" smtClean="0"/>
-              <a:t>2026. 9. 22.</a:t>
+              <a:t>2026. 10. 6.</a:t>
             </a:fld>
             <a:endParaRPr lang="ko-KR" altLang="en-US"/>
           </a:p>
@@ -2290,7 +2290,7 @@
           <a:p>
             <a:fld id="{FB30EDBD-1C2D-4C1E-B459-B60219FAB484}" type="datetimeFigureOut">
               <a:rPr lang="ko-KR" altLang="en-US" smtClean="0"/>
-              <a:t>2026. 9. 22.</a:t>
+              <a:t>2026. 10. 6.</a:t>
             </a:fld>
             <a:endParaRPr lang="ko-KR" altLang="en-US"/>
           </a:p>
@@ -2380,7 +2380,7 @@
           <a:p>
             <a:fld id="{FB30EDBD-1C2D-4C1E-B459-B60219FAB484}" type="datetimeFigureOut">
               <a:rPr lang="ko-KR" altLang="en-US" smtClean="0"/>
-              <a:t>2026. 9. 22.</a:t>
+              <a:t>2026. 10. 6.</a:t>
             </a:fld>
             <a:endParaRPr lang="ko-KR" altLang="en-US"/>
           </a:p>
@@ -2650,7 +2650,7 @@
           <a:p>
             <a:fld id="{FB30EDBD-1C2D-4C1E-B459-B60219FAB484}" type="datetimeFigureOut">
               <a:rPr lang="ko-KR" altLang="en-US" smtClean="0"/>
-              <a:t>2026. 9. 22.</a:t>
+              <a:t>2026. 10. 6.</a:t>
             </a:fld>
             <a:endParaRPr lang="ko-KR" altLang="en-US"/>
           </a:p>
@@ -2897,7 +2897,7 @@
           <a:p>
             <a:fld id="{FB30EDBD-1C2D-4C1E-B459-B60219FAB484}" type="datetimeFigureOut">
               <a:rPr lang="ko-KR" altLang="en-US" smtClean="0"/>
-              <a:t>2026. 9. 22.</a:t>
+              <a:t>2026. 10. 6.</a:t>
             </a:fld>
             <a:endParaRPr lang="ko-KR" altLang="en-US"/>
           </a:p>
@@ -3103,7 +3103,7 @@
           <a:p>
             <a:fld id="{FB30EDBD-1C2D-4C1E-B459-B60219FAB484}" type="datetimeFigureOut">
               <a:rPr lang="ko-KR" altLang="en-US" smtClean="0"/>
-              <a:t>2026. 9. 22.</a:t>
+              <a:t>2026. 10. 6.</a:t>
             </a:fld>
             <a:endParaRPr lang="ko-KR" altLang="en-US"/>
           </a:p>
@@ -3905,7 +3905,7 @@
         </p:nvSpPr>
         <p:spPr>
           <a:xfrm>
-            <a:off x="6770451" y="1159658"/>
+            <a:off x="6770451" y="1102094"/>
             <a:ext cx="1139438" cy="451511"/>
           </a:xfrm>
           <a:prstGeom prst="roundRect">
@@ -3913,7 +3913,11 @@
               <a:gd name="adj" fmla="val 14105"/>
             </a:avLst>
           </a:prstGeom>
-          <a:noFill/>
+          <a:solidFill>
+            <a:schemeClr val="bg2">
+              <a:lumMod val="90000"/>
+            </a:schemeClr>
+          </a:solidFill>
           <a:ln w="12700">
             <a:headEnd type="none" w="med" len="med"/>
             <a:tailEnd type="triangle" w="med" len="med"/>
@@ -3942,7 +3946,18 @@
               <a:rPr lang="en-US" altLang="ko-KR" sz="900"/>
               <a:t>Gateway Controller</a:t>
             </a:r>
-            <a:endParaRPr lang="ko-KR" altLang="en-US" sz="900" dirty="0"/>
+            <a:r>
+              <a:rPr lang="en-US" altLang="ko-KR" sz="900" b="1"/>
+              <a:t> </a:t>
+            </a:r>
+            <a:br>
+              <a:rPr lang="en-US" altLang="ko-KR" sz="900" b="1"/>
+            </a:br>
+            <a:r>
+              <a:rPr lang="en-US" altLang="ko-KR" sz="900" b="1"/>
+              <a:t>Deployment</a:t>
+            </a:r>
+            <a:endParaRPr lang="ko-KR" altLang="en-US" sz="900" b="1" dirty="0"/>
           </a:p>
         </p:txBody>
       </p:sp>
@@ -3958,14 +3973,14 @@
           <p:cNvCxnSpPr>
             <a:cxnSpLocks/>
             <a:stCxn id="4" idx="3"/>
-            <a:endCxn id="18" idx="0"/>
+            <a:endCxn id="18" idx="1"/>
           </p:cNvCxnSpPr>
           <p:nvPr/>
         </p:nvCxnSpPr>
         <p:spPr>
           <a:xfrm>
             <a:off x="6278617" y="961178"/>
-            <a:ext cx="1061553" cy="198480"/>
+            <a:ext cx="491834" cy="366672"/>
           </a:xfrm>
           <a:prstGeom prst="straightConnector1">
             <a:avLst/>
@@ -4136,8 +4151,8 @@
         </p:nvCxnSpPr>
         <p:spPr>
           <a:xfrm flipH="1">
-            <a:off x="3738027" y="1611169"/>
-            <a:ext cx="3602143" cy="480740"/>
+            <a:off x="3738027" y="1553605"/>
+            <a:ext cx="3602143" cy="538304"/>
           </a:xfrm>
           <a:prstGeom prst="straightConnector1">
             <a:avLst/>
@@ -4184,8 +4199,8 @@
         </p:nvCxnSpPr>
         <p:spPr>
           <a:xfrm>
-            <a:off x="7340170" y="1611169"/>
-            <a:ext cx="339599" cy="480740"/>
+            <a:off x="7340170" y="1553605"/>
+            <a:ext cx="339599" cy="538304"/>
           </a:xfrm>
           <a:prstGeom prst="straightConnector1">
             <a:avLst/>
@@ -6244,8 +6259,8 @@
         </p:nvCxnSpPr>
         <p:spPr>
           <a:xfrm>
-            <a:off x="7340170" y="1611169"/>
-            <a:ext cx="339599" cy="1178117"/>
+            <a:off x="7340170" y="1553605"/>
+            <a:ext cx="339599" cy="1235681"/>
           </a:xfrm>
           <a:prstGeom prst="straightConnector1">
             <a:avLst/>
@@ -6292,8 +6307,8 @@
         </p:nvCxnSpPr>
         <p:spPr>
           <a:xfrm flipH="1">
-            <a:off x="3736663" y="1611169"/>
-            <a:ext cx="3603507" cy="1181360"/>
+            <a:off x="3736663" y="1553605"/>
+            <a:ext cx="3603507" cy="1238924"/>
           </a:xfrm>
           <a:prstGeom prst="straightConnector1">
             <a:avLst/>
@@ -6712,6 +6727,65 @@
           </a:prstGeom>
         </p:spPr>
       </p:pic>
+      <p:sp>
+        <p:nvSpPr>
+          <p:cNvPr id="2" name="사각형: 둥근 모서리 70">
+            <a:extLst>
+              <a:ext uri="{FF2B5EF4-FFF2-40B4-BE49-F238E27FC236}">
+                <a16:creationId xmlns:a16="http://schemas.microsoft.com/office/drawing/2014/main" id="{A457F069-5FE3-0086-916F-8620D3BC3E7D}"/>
+              </a:ext>
+            </a:extLst>
+          </p:cNvPr>
+          <p:cNvSpPr/>
+          <p:nvPr/>
+        </p:nvSpPr>
+        <p:spPr>
+          <a:xfrm>
+            <a:off x="6647429" y="693167"/>
+            <a:ext cx="1385482" cy="951484"/>
+          </a:xfrm>
+          <a:prstGeom prst="roundRect">
+            <a:avLst>
+              <a:gd name="adj" fmla="val 7127"/>
+            </a:avLst>
+          </a:prstGeom>
+          <a:noFill/>
+          <a:ln w="12700">
+            <a:prstDash val="solid"/>
+            <a:headEnd type="none" w="med" len="med"/>
+            <a:tailEnd type="triangle" w="med" len="med"/>
+          </a:ln>
+        </p:spPr>
+        <p:style>
+          <a:lnRef idx="2">
+            <a:schemeClr val="dk1"/>
+          </a:lnRef>
+          <a:fillRef idx="1">
+            <a:schemeClr val="lt1"/>
+          </a:fillRef>
+          <a:effectRef idx="0">
+            <a:schemeClr val="dk1"/>
+          </a:effectRef>
+          <a:fontRef idx="minor">
+            <a:schemeClr val="dk1"/>
+          </a:fontRef>
+        </p:style>
+        <p:txBody>
+          <a:bodyPr rtlCol="0" anchor="t"/>
+          <a:lstStyle/>
+          <a:p>
+            <a:r>
+              <a:rPr lang="en-US" altLang="ko-KR" sz="1000" dirty="0"/>
+              <a:t>Controller </a:t>
+            </a:r>
+            <a:r>
+              <a:rPr lang="en-US" altLang="ko-KR" sz="1000" b="1" dirty="0"/>
+              <a:t>Namespace</a:t>
+            </a:r>
+            <a:endParaRPr lang="ko-KR" altLang="en-US" sz="1000" b="1" dirty="0"/>
+          </a:p>
+        </p:txBody>
+      </p:sp>
     </p:spTree>
     <p:extLst>
       <p:ext uri="{BB962C8B-B14F-4D97-AF65-F5344CB8AC3E}">
